--- a/earthseed-overview.pptx
+++ b/earthseed-overview.pptx
@@ -1504,7 +1504,7 @@
                 <a:ea typeface="Helvetica Neue" pitchFamily="34" charset="-122"/>
                 <a:cs typeface="Helvetica Neue" pitchFamily="34" charset="-120"/>
               </a:rPr>
-              <a:t>COSIMA STUDIO — SPECULATIVE DESIGN</a:t>
+              <a:t>COSIMA STUDIO</a:t>
             </a:r>
             <a:endParaRPr lang="en-US" sz="900" dirty="0"/>
           </a:p>
@@ -2527,17 +2527,6 @@
             <a:pPr marL="0" indent="0">
               <a:buNone/>
             </a:pPr>
-            <a:r>
-              <a:rPr lang="en-US" sz="900" kern="0" spc="300" dirty="0">
-                <a:solidFill>
-                  <a:srgbClr val="C8A96E"/>
-                </a:solidFill>
-                <a:latin typeface="Helvetica Neue" pitchFamily="34" charset="0"/>
-                <a:ea typeface="Helvetica Neue" pitchFamily="34" charset="-122"/>
-                <a:cs typeface="Helvetica Neue" pitchFamily="34" charset="-120"/>
-              </a:rPr>
-              <a:t>SPECULATIVE DESIGN / SPECULATIVE MARKDOWN</a:t>
-            </a:r>
             <a:endParaRPr lang="en-US" sz="900" dirty="0"/>
           </a:p>
         </p:txBody>
@@ -3305,7 +3294,7 @@
                 <a:ea typeface="Helvetica Neue" pitchFamily="34" charset="-122"/>
                 <a:cs typeface="Helvetica Neue" pitchFamily="34" charset="-120"/>
               </a:rPr>
-              <a:t>THE REFERENCE</a:t>
+              <a:t>REFERENCE</a:t>
             </a:r>
             <a:endParaRPr lang="en-US" sz="900" dirty="0"/>
           </a:p>
@@ -6616,7 +6605,7 @@
                 <a:ea typeface="Helvetica Neue" pitchFamily="34" charset="-122"/>
                 <a:cs typeface="Helvetica Neue" pitchFamily="34" charset="-120"/>
               </a:rPr>
-              <a:t>DESIGN EXPLORATIONS — EXAMPLES OF POSSIBLE OUTPUTS</a:t>
+              <a:t>ACTIVATION</a:t>
             </a:r>
             <a:endParaRPr lang="en-US" sz="900" dirty="0"/>
           </a:p>
